--- a/CalendarioAgo2026/presentaciones/5_Condicionales.pptx
+++ b/CalendarioAgo2026/presentaciones/5_Condicionales.pptx
@@ -149,6 +149,35 @@
 </p:presentation>
 </file>
 
+<file path=ppt/changesInfos/changesInfo1.xml><?xml version="1.0" encoding="utf-8"?>
+<pc:chgInfo xmlns:a="http://schemas.openxmlformats.org/drawingml/2006/main" xmlns:r="http://schemas.openxmlformats.org/officeDocument/2006/relationships" xmlns:ac="http://schemas.microsoft.com/office/drawing/2013/main/command" xmlns:pc="http://schemas.microsoft.com/office/powerpoint/2013/main/command">
+  <pc:docChgLst>
+    <pc:chgData name="Lizethe Pérez Fuertes" userId="4ae9ef87-2a7d-42f8-8dfa-0a501a9e2ff4" providerId="ADAL" clId="{FDDD45CB-1330-4033-A842-3D2746AFF7C7}"/>
+    <pc:docChg chg="custSel modSld">
+      <pc:chgData name="Lizethe Pérez Fuertes" userId="4ae9ef87-2a7d-42f8-8dfa-0a501a9e2ff4" providerId="ADAL" clId="{FDDD45CB-1330-4033-A842-3D2746AFF7C7}" dt="2026-08-07T00:46:56.588" v="17" actId="27636"/>
+      <pc:docMkLst>
+        <pc:docMk/>
+      </pc:docMkLst>
+      <pc:sldChg chg="modSp mod">
+        <pc:chgData name="Lizethe Pérez Fuertes" userId="4ae9ef87-2a7d-42f8-8dfa-0a501a9e2ff4" providerId="ADAL" clId="{FDDD45CB-1330-4033-A842-3D2746AFF7C7}" dt="2026-08-07T00:46:56.588" v="17" actId="27636"/>
+        <pc:sldMkLst>
+          <pc:docMk/>
+          <pc:sldMk cId="2553855534" sldId="257"/>
+        </pc:sldMkLst>
+        <pc:spChg chg="mod">
+          <ac:chgData name="Lizethe Pérez Fuertes" userId="4ae9ef87-2a7d-42f8-8dfa-0a501a9e2ff4" providerId="ADAL" clId="{FDDD45CB-1330-4033-A842-3D2746AFF7C7}" dt="2026-08-07T00:46:56.588" v="17" actId="27636"/>
+          <ac:spMkLst>
+            <pc:docMk/>
+            <pc:sldMk cId="2553855534" sldId="257"/>
+            <ac:spMk id="2" creationId="{00000000-0000-0000-0000-000000000000}"/>
+          </ac:spMkLst>
+        </pc:spChg>
+      </pc:sldChg>
+    </pc:docChg>
+  </pc:docChgLst>
+</pc:chgInfo>
+</file>
+
 <file path=ppt/notesMasters/notesMaster1.xml><?xml version="1.0" encoding="utf-8"?>
 <p:notesMaster xmlns:a="http://schemas.openxmlformats.org/drawingml/2006/main" xmlns:r="http://schemas.openxmlformats.org/officeDocument/2006/relationships" xmlns:p="http://schemas.openxmlformats.org/presentationml/2006/main">
   <p:cSld>
@@ -231,7 +260,7 @@
           <a:p>
             <a:fld id="{2D445F07-8756-451B-A938-0248325FC7BB}" type="datetimeFigureOut">
               <a:rPr lang="es-MX" smtClean="0"/>
-              <a:t>24/07/2020</a:t>
+              <a:t>06/08/2026</a:t>
             </a:fld>
             <a:endParaRPr lang="es-MX" dirty="0"/>
           </a:p>
@@ -2108,7 +2137,7 @@
           <a:p>
             <a:fld id="{5E75A0DC-66C6-4CEC-A5EB-F8C97CEC3796}" type="datetimeFigureOut">
               <a:rPr lang="es-MX" smtClean="0"/>
-              <a:t>24/07/2020</a:t>
+              <a:t>06/08/2026</a:t>
             </a:fld>
             <a:endParaRPr lang="es-MX" dirty="0"/>
           </a:p>
@@ -2278,7 +2307,7 @@
           <a:p>
             <a:fld id="{5E75A0DC-66C6-4CEC-A5EB-F8C97CEC3796}" type="datetimeFigureOut">
               <a:rPr lang="es-MX" smtClean="0"/>
-              <a:t>24/07/2020</a:t>
+              <a:t>06/08/2026</a:t>
             </a:fld>
             <a:endParaRPr lang="es-MX" dirty="0"/>
           </a:p>
@@ -2458,7 +2487,7 @@
           <a:p>
             <a:fld id="{5E75A0DC-66C6-4CEC-A5EB-F8C97CEC3796}" type="datetimeFigureOut">
               <a:rPr lang="es-MX" smtClean="0"/>
-              <a:t>24/07/2020</a:t>
+              <a:t>06/08/2026</a:t>
             </a:fld>
             <a:endParaRPr lang="es-MX" dirty="0"/>
           </a:p>
@@ -2611,7 +2640,7 @@
           <a:p>
             <a:fld id="{1D8BD707-D9CF-40AE-B4C6-C98DA3205C09}" type="datetimeFigureOut">
               <a:rPr lang="en-US" smtClean="0"/>
-              <a:t>7/24/2020</a:t>
+              <a:t>8/6/2026</a:t>
             </a:fld>
             <a:endParaRPr lang="en-US"/>
           </a:p>
@@ -2735,7 +2764,7 @@
           <a:p>
             <a:fld id="{1D8BD707-D9CF-40AE-B4C6-C98DA3205C09}" type="datetimeFigureOut">
               <a:rPr lang="en-US" smtClean="0"/>
-              <a:t>7/24/2020</a:t>
+              <a:t>8/6/2026</a:t>
             </a:fld>
             <a:endParaRPr lang="en-US" dirty="0"/>
           </a:p>
@@ -2895,7 +2924,7 @@
           <a:p>
             <a:fld id="{5E75A0DC-66C6-4CEC-A5EB-F8C97CEC3796}" type="datetimeFigureOut">
               <a:rPr lang="es-MX" smtClean="0"/>
-              <a:t>24/07/2020</a:t>
+              <a:t>06/08/2026</a:t>
             </a:fld>
             <a:endParaRPr lang="es-MX" dirty="0"/>
           </a:p>
@@ -3141,7 +3170,7 @@
           <a:p>
             <a:fld id="{5E75A0DC-66C6-4CEC-A5EB-F8C97CEC3796}" type="datetimeFigureOut">
               <a:rPr lang="es-MX" smtClean="0"/>
-              <a:t>24/07/2020</a:t>
+              <a:t>06/08/2026</a:t>
             </a:fld>
             <a:endParaRPr lang="es-MX" dirty="0"/>
           </a:p>
@@ -3429,7 +3458,7 @@
           <a:p>
             <a:fld id="{5E75A0DC-66C6-4CEC-A5EB-F8C97CEC3796}" type="datetimeFigureOut">
               <a:rPr lang="es-MX" smtClean="0"/>
-              <a:t>24/07/2020</a:t>
+              <a:t>06/08/2026</a:t>
             </a:fld>
             <a:endParaRPr lang="es-MX" dirty="0"/>
           </a:p>
@@ -3851,7 +3880,7 @@
           <a:p>
             <a:fld id="{5E75A0DC-66C6-4CEC-A5EB-F8C97CEC3796}" type="datetimeFigureOut">
               <a:rPr lang="es-MX" smtClean="0"/>
-              <a:t>24/07/2020</a:t>
+              <a:t>06/08/2026</a:t>
             </a:fld>
             <a:endParaRPr lang="es-MX" dirty="0"/>
           </a:p>
@@ -3969,7 +3998,7 @@
           <a:p>
             <a:fld id="{5E75A0DC-66C6-4CEC-A5EB-F8C97CEC3796}" type="datetimeFigureOut">
               <a:rPr lang="es-MX" smtClean="0"/>
-              <a:t>24/07/2020</a:t>
+              <a:t>06/08/2026</a:t>
             </a:fld>
             <a:endParaRPr lang="es-MX" dirty="0"/>
           </a:p>
@@ -4064,7 +4093,7 @@
           <a:p>
             <a:fld id="{5E75A0DC-66C6-4CEC-A5EB-F8C97CEC3796}" type="datetimeFigureOut">
               <a:rPr lang="es-MX" smtClean="0"/>
-              <a:t>24/07/2020</a:t>
+              <a:t>06/08/2026</a:t>
             </a:fld>
             <a:endParaRPr lang="es-MX" dirty="0"/>
           </a:p>
@@ -4341,7 +4370,7 @@
           <a:p>
             <a:fld id="{5E75A0DC-66C6-4CEC-A5EB-F8C97CEC3796}" type="datetimeFigureOut">
               <a:rPr lang="es-MX" smtClean="0"/>
-              <a:t>24/07/2020</a:t>
+              <a:t>06/08/2026</a:t>
             </a:fld>
             <a:endParaRPr lang="es-MX" dirty="0"/>
           </a:p>
@@ -4594,7 +4623,7 @@
           <a:p>
             <a:fld id="{5E75A0DC-66C6-4CEC-A5EB-F8C97CEC3796}" type="datetimeFigureOut">
               <a:rPr lang="es-MX" smtClean="0"/>
-              <a:t>24/07/2020</a:t>
+              <a:t>06/08/2026</a:t>
             </a:fld>
             <a:endParaRPr lang="es-MX" dirty="0"/>
           </a:p>
@@ -4807,7 +4836,7 @@
           <a:p>
             <a:fld id="{5E75A0DC-66C6-4CEC-A5EB-F8C97CEC3796}" type="datetimeFigureOut">
               <a:rPr lang="es-MX" smtClean="0"/>
-              <a:t>24/07/2020</a:t>
+              <a:t>06/08/2026</a:t>
             </a:fld>
             <a:endParaRPr lang="es-MX" dirty="0"/>
           </a:p>
@@ -5202,7 +5231,7 @@
         </p:spPr>
         <p:txBody>
           <a:bodyPr rtlCol="0">
-            <a:normAutofit fontScale="90000"/>
+            <a:normAutofit/>
           </a:bodyPr>
           <a:lstStyle/>
           <a:p>
@@ -5213,17 +5242,17 @@
               <a:defRPr/>
             </a:pPr>
             <a:r>
-              <a:rPr lang="es-MX" sz="3200">
+              <a:rPr lang="es-MX" sz="3200" dirty="0">
                 <a:solidFill>
                   <a:schemeClr val="bg2">
                     <a:lumMod val="50000"/>
                   </a:schemeClr>
                 </a:solidFill>
               </a:rPr>
-              <a:t>TC1028 </a:t>
+              <a:t>TC 1037 </a:t>
             </a:r>
             <a:br>
-              <a:rPr lang="es-MX" sz="3200">
+              <a:rPr lang="es-MX" sz="3200" dirty="0">
                 <a:solidFill>
                   <a:schemeClr val="bg2">
                     <a:lumMod val="50000"/>
@@ -5232,22 +5261,15 @@
               </a:rPr>
             </a:br>
             <a:r>
-              <a:rPr lang="es-MX" sz="3200">
+              <a:rPr lang="es-MX" sz="3200" dirty="0">
                 <a:solidFill>
                   <a:schemeClr val="bg2">
                     <a:lumMod val="50000"/>
                   </a:schemeClr>
                 </a:solidFill>
               </a:rPr>
-              <a:t>Pensamiento Computacional para Ingeniería</a:t>
-            </a:r>
-            <a:endParaRPr lang="es-MX" sz="3200" dirty="0">
-              <a:solidFill>
-                <a:schemeClr val="bg2">
-                  <a:lumMod val="50000"/>
-                </a:schemeClr>
-              </a:solidFill>
-            </a:endParaRPr>
+              <a:t>Pensamiento algorítmico</a:t>
+            </a:r>
           </a:p>
         </p:txBody>
       </p:sp>

--- a/CalendarioAgo2026/presentaciones/5_Condicionales.pptx
+++ b/CalendarioAgo2026/presentaciones/5_Condicionales.pptx
@@ -154,22 +154,22 @@
   <pc:docChgLst>
     <pc:chgData name="Lizethe Pérez Fuertes" userId="4ae9ef87-2a7d-42f8-8dfa-0a501a9e2ff4" providerId="ADAL" clId="{FDDD45CB-1330-4033-A842-3D2746AFF7C7}"/>
     <pc:docChg chg="custSel modSld">
-      <pc:chgData name="Lizethe Pérez Fuertes" userId="4ae9ef87-2a7d-42f8-8dfa-0a501a9e2ff4" providerId="ADAL" clId="{FDDD45CB-1330-4033-A842-3D2746AFF7C7}" dt="2026-08-07T00:46:56.588" v="17" actId="27636"/>
+      <pc:chgData name="Lizethe Pérez Fuertes" userId="4ae9ef87-2a7d-42f8-8dfa-0a501a9e2ff4" providerId="ADAL" clId="{FDDD45CB-1330-4033-A842-3D2746AFF7C7}" dt="2026-09-29T14:51:53.995" v="18" actId="1076"/>
       <pc:docMkLst>
         <pc:docMk/>
       </pc:docMkLst>
       <pc:sldChg chg="modSp mod">
-        <pc:chgData name="Lizethe Pérez Fuertes" userId="4ae9ef87-2a7d-42f8-8dfa-0a501a9e2ff4" providerId="ADAL" clId="{FDDD45CB-1330-4033-A842-3D2746AFF7C7}" dt="2026-08-07T00:46:56.588" v="17" actId="27636"/>
+        <pc:chgData name="Lizethe Pérez Fuertes" userId="4ae9ef87-2a7d-42f8-8dfa-0a501a9e2ff4" providerId="ADAL" clId="{FDDD45CB-1330-4033-A842-3D2746AFF7C7}" dt="2026-09-29T14:51:53.995" v="18" actId="1076"/>
         <pc:sldMkLst>
           <pc:docMk/>
-          <pc:sldMk cId="2553855534" sldId="257"/>
+          <pc:sldMk cId="1694882742" sldId="360"/>
         </pc:sldMkLst>
         <pc:spChg chg="mod">
-          <ac:chgData name="Lizethe Pérez Fuertes" userId="4ae9ef87-2a7d-42f8-8dfa-0a501a9e2ff4" providerId="ADAL" clId="{FDDD45CB-1330-4033-A842-3D2746AFF7C7}" dt="2026-08-07T00:46:56.588" v="17" actId="27636"/>
+          <ac:chgData name="Lizethe Pérez Fuertes" userId="4ae9ef87-2a7d-42f8-8dfa-0a501a9e2ff4" providerId="ADAL" clId="{FDDD45CB-1330-4033-A842-3D2746AFF7C7}" dt="2026-09-29T14:51:53.995" v="18" actId="1076"/>
           <ac:spMkLst>
             <pc:docMk/>
-            <pc:sldMk cId="2553855534" sldId="257"/>
-            <ac:spMk id="2" creationId="{00000000-0000-0000-0000-000000000000}"/>
+            <pc:sldMk cId="1694882742" sldId="360"/>
+            <ac:spMk id="24" creationId="{38AB52DC-E9F4-41A5-82E5-103F8EF73AFA}"/>
           </ac:spMkLst>
         </pc:spChg>
       </pc:sldChg>
@@ -260,7 +260,7 @@
           <a:p>
             <a:fld id="{2D445F07-8756-451B-A938-0248325FC7BB}" type="datetimeFigureOut">
               <a:rPr lang="es-MX" smtClean="0"/>
-              <a:t>06/08/2026</a:t>
+              <a:t>29/09/2026</a:t>
             </a:fld>
             <a:endParaRPr lang="es-MX" dirty="0"/>
           </a:p>
@@ -2137,7 +2137,7 @@
           <a:p>
             <a:fld id="{5E75A0DC-66C6-4CEC-A5EB-F8C97CEC3796}" type="datetimeFigureOut">
               <a:rPr lang="es-MX" smtClean="0"/>
-              <a:t>06/08/2026</a:t>
+              <a:t>29/09/2026</a:t>
             </a:fld>
             <a:endParaRPr lang="es-MX" dirty="0"/>
           </a:p>
@@ -2307,7 +2307,7 @@
           <a:p>
             <a:fld id="{5E75A0DC-66C6-4CEC-A5EB-F8C97CEC3796}" type="datetimeFigureOut">
               <a:rPr lang="es-MX" smtClean="0"/>
-              <a:t>06/08/2026</a:t>
+              <a:t>29/09/2026</a:t>
             </a:fld>
             <a:endParaRPr lang="es-MX" dirty="0"/>
           </a:p>
@@ -2487,7 +2487,7 @@
           <a:p>
             <a:fld id="{5E75A0DC-66C6-4CEC-A5EB-F8C97CEC3796}" type="datetimeFigureOut">
               <a:rPr lang="es-MX" smtClean="0"/>
-              <a:t>06/08/2026</a:t>
+              <a:t>29/09/2026</a:t>
             </a:fld>
             <a:endParaRPr lang="es-MX" dirty="0"/>
           </a:p>
@@ -2640,7 +2640,7 @@
           <a:p>
             <a:fld id="{1D8BD707-D9CF-40AE-B4C6-C98DA3205C09}" type="datetimeFigureOut">
               <a:rPr lang="en-US" smtClean="0"/>
-              <a:t>8/6/2026</a:t>
+              <a:t>9/29/2026</a:t>
             </a:fld>
             <a:endParaRPr lang="en-US"/>
           </a:p>
@@ -2764,7 +2764,7 @@
           <a:p>
             <a:fld id="{1D8BD707-D9CF-40AE-B4C6-C98DA3205C09}" type="datetimeFigureOut">
               <a:rPr lang="en-US" smtClean="0"/>
-              <a:t>8/6/2026</a:t>
+              <a:t>9/29/2026</a:t>
             </a:fld>
             <a:endParaRPr lang="en-US" dirty="0"/>
           </a:p>
@@ -2924,7 +2924,7 @@
           <a:p>
             <a:fld id="{5E75A0DC-66C6-4CEC-A5EB-F8C97CEC3796}" type="datetimeFigureOut">
               <a:rPr lang="es-MX" smtClean="0"/>
-              <a:t>06/08/2026</a:t>
+              <a:t>29/09/2026</a:t>
             </a:fld>
             <a:endParaRPr lang="es-MX" dirty="0"/>
           </a:p>
@@ -3170,7 +3170,7 @@
           <a:p>
             <a:fld id="{5E75A0DC-66C6-4CEC-A5EB-F8C97CEC3796}" type="datetimeFigureOut">
               <a:rPr lang="es-MX" smtClean="0"/>
-              <a:t>06/08/2026</a:t>
+              <a:t>29/09/2026</a:t>
             </a:fld>
             <a:endParaRPr lang="es-MX" dirty="0"/>
           </a:p>
@@ -3458,7 +3458,7 @@
           <a:p>
             <a:fld id="{5E75A0DC-66C6-4CEC-A5EB-F8C97CEC3796}" type="datetimeFigureOut">
               <a:rPr lang="es-MX" smtClean="0"/>
-              <a:t>06/08/2026</a:t>
+              <a:t>29/09/2026</a:t>
             </a:fld>
             <a:endParaRPr lang="es-MX" dirty="0"/>
           </a:p>
@@ -3880,7 +3880,7 @@
           <a:p>
             <a:fld id="{5E75A0DC-66C6-4CEC-A5EB-F8C97CEC3796}" type="datetimeFigureOut">
               <a:rPr lang="es-MX" smtClean="0"/>
-              <a:t>06/08/2026</a:t>
+              <a:t>29/09/2026</a:t>
             </a:fld>
             <a:endParaRPr lang="es-MX" dirty="0"/>
           </a:p>
@@ -3998,7 +3998,7 @@
           <a:p>
             <a:fld id="{5E75A0DC-66C6-4CEC-A5EB-F8C97CEC3796}" type="datetimeFigureOut">
               <a:rPr lang="es-MX" smtClean="0"/>
-              <a:t>06/08/2026</a:t>
+              <a:t>29/09/2026</a:t>
             </a:fld>
             <a:endParaRPr lang="es-MX" dirty="0"/>
           </a:p>
@@ -4093,7 +4093,7 @@
           <a:p>
             <a:fld id="{5E75A0DC-66C6-4CEC-A5EB-F8C97CEC3796}" type="datetimeFigureOut">
               <a:rPr lang="es-MX" smtClean="0"/>
-              <a:t>06/08/2026</a:t>
+              <a:t>29/09/2026</a:t>
             </a:fld>
             <a:endParaRPr lang="es-MX" dirty="0"/>
           </a:p>
@@ -4370,7 +4370,7 @@
           <a:p>
             <a:fld id="{5E75A0DC-66C6-4CEC-A5EB-F8C97CEC3796}" type="datetimeFigureOut">
               <a:rPr lang="es-MX" smtClean="0"/>
-              <a:t>06/08/2026</a:t>
+              <a:t>29/09/2026</a:t>
             </a:fld>
             <a:endParaRPr lang="es-MX" dirty="0"/>
           </a:p>
@@ -4623,7 +4623,7 @@
           <a:p>
             <a:fld id="{5E75A0DC-66C6-4CEC-A5EB-F8C97CEC3796}" type="datetimeFigureOut">
               <a:rPr lang="es-MX" smtClean="0"/>
-              <a:t>06/08/2026</a:t>
+              <a:t>29/09/2026</a:t>
             </a:fld>
             <a:endParaRPr lang="es-MX" dirty="0"/>
           </a:p>
@@ -4836,7 +4836,7 @@
           <a:p>
             <a:fld id="{5E75A0DC-66C6-4CEC-A5EB-F8C97CEC3796}" type="datetimeFigureOut">
               <a:rPr lang="es-MX" smtClean="0"/>
-              <a:t>06/08/2026</a:t>
+              <a:t>29/09/2026</a:t>
             </a:fld>
             <a:endParaRPr lang="es-MX" dirty="0"/>
           </a:p>
@@ -25771,7 +25771,7 @@
         </p:nvSpPr>
         <p:spPr>
           <a:xfrm>
-            <a:off x="2601618" y="2426047"/>
+            <a:off x="2595248" y="2426047"/>
             <a:ext cx="2118995" cy="2957221"/>
           </a:xfrm>
           <a:prstGeom prst="rect">
